--- a/03-build/pptx/C4_U7_alumno.pptx
+++ b/03-build/pptx/C4_U7_alumno.pptx
@@ -4204,7 +4204,6 @@
               <a:srgbClr val="D64550"/>
             </a:solidFill>
           </a:ln>
-          <a:effectLst/>
           <a:effectLst>
             <a:outerShdw blurRad="90000" dist="38000" dir="5400000" rotWithShape="0">
               <a:srgbClr val="20242E">
@@ -4392,7 +4391,6 @@
               <a:srgbClr val="E4E3DE"/>
             </a:solidFill>
           </a:ln>
-          <a:effectLst/>
           <a:effectLst>
             <a:outerShdw blurRad="90000" dist="38000" dir="5400000" rotWithShape="0">
               <a:srgbClr val="20242E">
@@ -5117,7 +5115,6 @@
               <a:srgbClr val="E4E3DE"/>
             </a:solidFill>
           </a:ln>
-          <a:effectLst/>
           <a:effectLst>
             <a:outerShdw blurRad="90000" dist="38000" dir="5400000" rotWithShape="0">
               <a:srgbClr val="20242E">
@@ -5261,7 +5258,6 @@
               <a:srgbClr val="E4E3DE"/>
             </a:solidFill>
           </a:ln>
-          <a:effectLst/>
           <a:effectLst>
             <a:outerShdw blurRad="90000" dist="38000" dir="5400000" rotWithShape="0">
               <a:srgbClr val="20242E">
@@ -5405,7 +5401,6 @@
               <a:srgbClr val="E4E3DE"/>
             </a:solidFill>
           </a:ln>
-          <a:effectLst/>
           <a:effectLst>
             <a:outerShdw blurRad="90000" dist="38000" dir="5400000" rotWithShape="0">
               <a:srgbClr val="20242E">
@@ -5549,7 +5544,6 @@
               <a:srgbClr val="E4E3DE"/>
             </a:solidFill>
           </a:ln>
-          <a:effectLst/>
           <a:effectLst>
             <a:outerShdw blurRad="90000" dist="38000" dir="5400000" rotWithShape="0">
               <a:srgbClr val="20242E">
@@ -5693,7 +5687,6 @@
               <a:srgbClr val="E4E3DE"/>
             </a:solidFill>
           </a:ln>
-          <a:effectLst/>
           <a:effectLst>
             <a:outerShdw blurRad="90000" dist="38000" dir="5400000" rotWithShape="0">
               <a:srgbClr val="20242E">
@@ -5837,7 +5830,6 @@
               <a:srgbClr val="E4E3DE"/>
             </a:solidFill>
           </a:ln>
-          <a:effectLst/>
           <a:effectLst>
             <a:outerShdw blurRad="90000" dist="38000" dir="5400000" rotWithShape="0">
               <a:srgbClr val="20242E">
@@ -5981,7 +5973,6 @@
               <a:srgbClr val="D64550"/>
             </a:solidFill>
           </a:ln>
-          <a:effectLst/>
           <a:effectLst>
             <a:outerShdw blurRad="90000" dist="38000" dir="5400000" rotWithShape="0">
               <a:srgbClr val="20242E">
@@ -6618,7 +6609,6 @@
               <a:srgbClr val="D64550"/>
             </a:solidFill>
           </a:ln>
-          <a:effectLst/>
           <a:effectLst>
             <a:outerShdw blurRad="90000" dist="38000" dir="5400000" rotWithShape="0">
               <a:srgbClr val="20242E">
@@ -6878,7 +6868,6 @@
               <a:srgbClr val="D64550"/>
             </a:solidFill>
           </a:ln>
-          <a:effectLst/>
           <a:effectLst>
             <a:outerShdw blurRad="90000" dist="38000" dir="5400000" rotWithShape="0">
               <a:srgbClr val="20242E">
@@ -7657,7 +7646,6 @@
               <a:srgbClr val="E4E3DE"/>
             </a:solidFill>
           </a:ln>
-          <a:effectLst/>
           <a:effectLst>
             <a:outerShdw blurRad="90000" dist="38000" dir="5400000" rotWithShape="0">
               <a:srgbClr val="20242E">
@@ -7811,7 +7799,6 @@
               <a:srgbClr val="E4E3DE"/>
             </a:solidFill>
           </a:ln>
-          <a:effectLst/>
           <a:effectLst>
             <a:outerShdw blurRad="90000" dist="38000" dir="5400000" rotWithShape="0">
               <a:srgbClr val="20242E">
@@ -7965,7 +7952,6 @@
               <a:srgbClr val="E4E3DE"/>
             </a:solidFill>
           </a:ln>
-          <a:effectLst/>
           <a:effectLst>
             <a:outerShdw blurRad="90000" dist="38000" dir="5400000" rotWithShape="0">
               <a:srgbClr val="20242E">
@@ -8119,7 +8105,6 @@
               <a:srgbClr val="E4E3DE"/>
             </a:solidFill>
           </a:ln>
-          <a:effectLst/>
           <a:effectLst>
             <a:outerShdw blurRad="90000" dist="38000" dir="5400000" rotWithShape="0">
               <a:srgbClr val="20242E">
@@ -8273,7 +8258,6 @@
               <a:srgbClr val="D64550"/>
             </a:solidFill>
           </a:ln>
-          <a:effectLst/>
           <a:effectLst>
             <a:outerShdw blurRad="90000" dist="38000" dir="5400000" rotWithShape="0">
               <a:srgbClr val="20242E">
@@ -8427,7 +8411,6 @@
               <a:srgbClr val="E4E3DE"/>
             </a:solidFill>
           </a:ln>
-          <a:effectLst/>
           <a:effectLst>
             <a:outerShdw blurRad="90000" dist="38000" dir="5400000" rotWithShape="0">
               <a:srgbClr val="20242E">
@@ -8581,7 +8564,6 @@
               <a:srgbClr val="E4E3DE"/>
             </a:solidFill>
           </a:ln>
-          <a:effectLst/>
           <a:effectLst>
             <a:outerShdw blurRad="90000" dist="38000" dir="5400000" rotWithShape="0">
               <a:srgbClr val="20242E">
@@ -8735,7 +8717,6 @@
               <a:srgbClr val="E4E3DE"/>
             </a:solidFill>
           </a:ln>
-          <a:effectLst/>
           <a:effectLst>
             <a:outerShdw blurRad="90000" dist="38000" dir="5400000" rotWithShape="0">
               <a:srgbClr val="20242E">
@@ -8889,7 +8870,6 @@
               <a:srgbClr val="E4E3DE"/>
             </a:solidFill>
           </a:ln>
-          <a:effectLst/>
           <a:effectLst>
             <a:outerShdw blurRad="90000" dist="38000" dir="5400000" rotWithShape="0">
               <a:srgbClr val="20242E">
@@ -9043,7 +9023,6 @@
               <a:srgbClr val="E4E3DE"/>
             </a:solidFill>
           </a:ln>
-          <a:effectLst/>
           <a:effectLst>
             <a:outerShdw blurRad="90000" dist="38000" dir="5400000" rotWithShape="0">
               <a:srgbClr val="20242E">
@@ -9197,7 +9176,6 @@
               <a:srgbClr val="E4E3DE"/>
             </a:solidFill>
           </a:ln>
-          <a:effectLst/>
           <a:effectLst>
             <a:outerShdw blurRad="90000" dist="38000" dir="5400000" rotWithShape="0">
               <a:srgbClr val="20242E">
@@ -9351,7 +9329,6 @@
               <a:srgbClr val="E4E3DE"/>
             </a:solidFill>
           </a:ln>
-          <a:effectLst/>
           <a:effectLst>
             <a:outerShdw blurRad="90000" dist="38000" dir="5400000" rotWithShape="0">
               <a:srgbClr val="20242E">
@@ -9505,7 +9482,6 @@
               <a:srgbClr val="E4E3DE"/>
             </a:solidFill>
           </a:ln>
-          <a:effectLst/>
           <a:effectLst>
             <a:outerShdw blurRad="90000" dist="38000" dir="5400000" rotWithShape="0">
               <a:srgbClr val="20242E">
@@ -9659,7 +9635,6 @@
               <a:srgbClr val="E4E3DE"/>
             </a:solidFill>
           </a:ln>
-          <a:effectLst/>
           <a:effectLst>
             <a:outerShdw blurRad="90000" dist="38000" dir="5400000" rotWithShape="0">
               <a:srgbClr val="20242E">
@@ -9813,7 +9788,6 @@
               <a:srgbClr val="D64550"/>
             </a:solidFill>
           </a:ln>
-          <a:effectLst/>
           <a:effectLst>
             <a:outerShdw blurRad="90000" dist="38000" dir="5400000" rotWithShape="0">
               <a:srgbClr val="20242E">
@@ -9967,7 +9941,6 @@
               <a:srgbClr val="D64550"/>
             </a:solidFill>
           </a:ln>
-          <a:effectLst/>
           <a:effectLst>
             <a:outerShdw blurRad="90000" dist="38000" dir="5400000" rotWithShape="0">
               <a:srgbClr val="20242E">
@@ -10604,7 +10577,6 @@
               <a:srgbClr val="E4E3DE"/>
             </a:solidFill>
           </a:ln>
-          <a:effectLst/>
           <a:effectLst>
             <a:outerShdw blurRad="90000" dist="38000" dir="5400000" rotWithShape="0">
               <a:srgbClr val="20242E">
@@ -10880,7 +10852,6 @@
               <a:srgbClr val="D64550"/>
             </a:solidFill>
           </a:ln>
-          <a:effectLst/>
           <a:effectLst>
             <a:outerShdw blurRad="90000" dist="38000" dir="5400000" rotWithShape="0">
               <a:srgbClr val="20242E">
@@ -11802,7 +11773,6 @@
               <a:srgbClr val="E4E3DE"/>
             </a:solidFill>
           </a:ln>
-          <a:effectLst/>
           <a:effectLst>
             <a:outerShdw blurRad="90000" dist="38000" dir="5400000" rotWithShape="0">
               <a:srgbClr val="20242E">
@@ -11971,7 +11941,6 @@
               <a:srgbClr val="E4E3DE"/>
             </a:solidFill>
           </a:ln>
-          <a:effectLst/>
           <a:effectLst>
             <a:outerShdw blurRad="90000" dist="38000" dir="5400000" rotWithShape="0">
               <a:srgbClr val="20242E">
@@ -12140,7 +12109,6 @@
               <a:srgbClr val="E4E3DE"/>
             </a:solidFill>
           </a:ln>
-          <a:effectLst/>
           <a:effectLst>
             <a:outerShdw blurRad="90000" dist="38000" dir="5400000" rotWithShape="0">
               <a:srgbClr val="20242E">
@@ -12309,7 +12277,6 @@
               <a:srgbClr val="E4E3DE"/>
             </a:solidFill>
           </a:ln>
-          <a:effectLst/>
           <a:effectLst>
             <a:outerShdw blurRad="90000" dist="38000" dir="5400000" rotWithShape="0">
               <a:srgbClr val="20242E">
@@ -12478,7 +12445,6 @@
               <a:srgbClr val="E4E3DE"/>
             </a:solidFill>
           </a:ln>
-          <a:effectLst/>
           <a:effectLst>
             <a:outerShdw blurRad="90000" dist="38000" dir="5400000" rotWithShape="0">
               <a:srgbClr val="20242E">
@@ -12647,7 +12613,6 @@
               <a:srgbClr val="E4E3DE"/>
             </a:solidFill>
           </a:ln>
-          <a:effectLst/>
           <a:effectLst>
             <a:outerShdw blurRad="90000" dist="38000" dir="5400000" rotWithShape="0">
               <a:srgbClr val="20242E">
@@ -12816,7 +12781,6 @@
               <a:srgbClr val="E4E3DE"/>
             </a:solidFill>
           </a:ln>
-          <a:effectLst/>
           <a:effectLst>
             <a:outerShdw blurRad="90000" dist="38000" dir="5400000" rotWithShape="0">
               <a:srgbClr val="20242E">
@@ -12985,7 +12949,6 @@
               <a:srgbClr val="E4E3DE"/>
             </a:solidFill>
           </a:ln>
-          <a:effectLst/>
           <a:effectLst>
             <a:outerShdw blurRad="90000" dist="38000" dir="5400000" rotWithShape="0">
               <a:srgbClr val="20242E">
@@ -13154,7 +13117,6 @@
               <a:srgbClr val="E4E3DE"/>
             </a:solidFill>
           </a:ln>
-          <a:effectLst/>
           <a:effectLst>
             <a:outerShdw blurRad="90000" dist="38000" dir="5400000" rotWithShape="0">
               <a:srgbClr val="20242E">
@@ -13903,7 +13865,6 @@
               <a:srgbClr val="E4E3DE"/>
             </a:solidFill>
           </a:ln>
-          <a:effectLst/>
           <a:effectLst>
             <a:outerShdw blurRad="90000" dist="38000" dir="5400000" rotWithShape="0">
               <a:srgbClr val="20242E">
@@ -14858,7 +14819,6 @@
               <a:srgbClr val="D64550"/>
             </a:solidFill>
           </a:ln>
-          <a:effectLst/>
           <a:effectLst>
             <a:outerShdw blurRad="90000" dist="38000" dir="5400000" rotWithShape="0">
               <a:srgbClr val="20242E">
@@ -15607,7 +15567,6 @@
               <a:srgbClr val="E4E3DE"/>
             </a:solidFill>
           </a:ln>
-          <a:effectLst/>
           <a:effectLst>
             <a:outerShdw blurRad="90000" dist="38000" dir="5400000" rotWithShape="0">
               <a:srgbClr val="20242E">
@@ -15818,7 +15777,6 @@
               <a:srgbClr val="E4E3DE"/>
             </a:solidFill>
           </a:ln>
-          <a:effectLst/>
           <a:effectLst>
             <a:outerShdw blurRad="90000" dist="38000" dir="5400000" rotWithShape="0">
               <a:srgbClr val="20242E">
@@ -16029,7 +15987,6 @@
               <a:srgbClr val="D64550"/>
             </a:solidFill>
           </a:ln>
-          <a:effectLst/>
           <a:effectLst>
             <a:outerShdw blurRad="90000" dist="38000" dir="5400000" rotWithShape="0">
               <a:srgbClr val="20242E">
@@ -16927,7 +16884,6 @@
               <a:srgbClr val="E4E3DE"/>
             </a:solidFill>
           </a:ln>
-          <a:effectLst/>
           <a:effectLst>
             <a:outerShdw blurRad="90000" dist="38000" dir="5400000" rotWithShape="0">
               <a:srgbClr val="20242E">
@@ -17351,7 +17307,6 @@
               <a:srgbClr val="E4E3DE"/>
             </a:solidFill>
           </a:ln>
-          <a:effectLst/>
           <a:effectLst>
             <a:outerShdw blurRad="90000" dist="38000" dir="5400000" rotWithShape="0">
               <a:srgbClr val="20242E">
@@ -17721,7 +17676,6 @@
               <a:srgbClr val="E4E3DE"/>
             </a:solidFill>
           </a:ln>
-          <a:effectLst/>
           <a:effectLst>
             <a:outerShdw blurRad="90000" dist="38000" dir="5400000" rotWithShape="0">
               <a:srgbClr val="20242E">
@@ -18565,7 +18519,6 @@
               <a:srgbClr val="D64550"/>
             </a:solidFill>
           </a:ln>
-          <a:effectLst/>
           <a:effectLst>
             <a:outerShdw blurRad="90000" dist="38000" dir="5400000" rotWithShape="0">
               <a:srgbClr val="20242E">
@@ -18935,7 +18888,6 @@
               <a:srgbClr val="E4E3DE"/>
             </a:solidFill>
           </a:ln>
-          <a:effectLst/>
           <a:effectLst>
             <a:outerShdw blurRad="90000" dist="38000" dir="5400000" rotWithShape="0">
               <a:srgbClr val="20242E">
@@ -20387,7 +20339,6 @@
               <a:srgbClr val="E4E3DE"/>
             </a:solidFill>
           </a:ln>
-          <a:effectLst/>
           <a:effectLst>
             <a:outerShdw blurRad="90000" dist="38000" dir="5400000" rotWithShape="0">
               <a:srgbClr val="20242E">
@@ -20824,7 +20775,6 @@
               <a:srgbClr val="D64550"/>
             </a:solidFill>
           </a:ln>
-          <a:effectLst/>
           <a:effectLst>
             <a:outerShdw blurRad="90000" dist="38000" dir="5400000" rotWithShape="0">
               <a:srgbClr val="20242E">
@@ -21733,7 +21683,6 @@
               <a:srgbClr val="E4E3DE"/>
             </a:solidFill>
           </a:ln>
-          <a:effectLst/>
           <a:effectLst>
             <a:outerShdw blurRad="90000" dist="38000" dir="5400000" rotWithShape="0">
               <a:srgbClr val="20242E">
@@ -22022,7 +21971,6 @@
               <a:srgbClr val="D64550"/>
             </a:solidFill>
           </a:ln>
-          <a:effectLst/>
           <a:effectLst>
             <a:outerShdw blurRad="90000" dist="38000" dir="5400000" rotWithShape="0">
               <a:srgbClr val="20242E">
@@ -22287,7 +22235,6 @@
               <a:srgbClr val="D64550"/>
             </a:solidFill>
           </a:ln>
-          <a:effectLst/>
           <a:effectLst>
             <a:outerShdw blurRad="90000" dist="38000" dir="5400000" rotWithShape="0">
               <a:srgbClr val="20242E">
@@ -23400,7 +23347,6 @@
               <a:srgbClr val="E4E3DE"/>
             </a:solidFill>
           </a:ln>
-          <a:effectLst/>
           <a:effectLst>
             <a:outerShdw blurRad="90000" dist="38000" dir="5400000" rotWithShape="0">
               <a:srgbClr val="20242E">
